--- a/templates/elite.pptx
+++ b/templates/elite.pptx
@@ -351,7 +351,7 @@
             <a:fld id="{1D8BD707-D9CF-40AE-B4C6-C98DA3205C09}" type="datetimeFigureOut">
               <a:rPr lang="en-US" smtClean="0"/>
               <a:pPr/>
-              <a:t>6/23/2026</a:t>
+              <a:t>6/26/2026</a:t>
             </a:fld>
             <a:endParaRPr lang="en-US"/>
           </a:p>
@@ -516,7 +516,7 @@
             <a:fld id="{1D8BD707-D9CF-40AE-B4C6-C98DA3205C09}" type="datetimeFigureOut">
               <a:rPr lang="en-US" smtClean="0"/>
               <a:pPr/>
-              <a:t>6/23/2026</a:t>
+              <a:t>6/26/2026</a:t>
             </a:fld>
             <a:endParaRPr lang="en-US"/>
           </a:p>
@@ -691,7 +691,7 @@
             <a:fld id="{1D8BD707-D9CF-40AE-B4C6-C98DA3205C09}" type="datetimeFigureOut">
               <a:rPr lang="en-US" smtClean="0"/>
               <a:pPr/>
-              <a:t>6/23/2026</a:t>
+              <a:t>6/26/2026</a:t>
             </a:fld>
             <a:endParaRPr lang="en-US"/>
           </a:p>
@@ -856,7 +856,7 @@
             <a:fld id="{1D8BD707-D9CF-40AE-B4C6-C98DA3205C09}" type="datetimeFigureOut">
               <a:rPr lang="en-US" smtClean="0"/>
               <a:pPr/>
-              <a:t>6/23/2026</a:t>
+              <a:t>6/26/2026</a:t>
             </a:fld>
             <a:endParaRPr lang="en-US"/>
           </a:p>
@@ -1098,7 +1098,7 @@
             <a:fld id="{1D8BD707-D9CF-40AE-B4C6-C98DA3205C09}" type="datetimeFigureOut">
               <a:rPr lang="en-US" smtClean="0"/>
               <a:pPr/>
-              <a:t>6/23/2026</a:t>
+              <a:t>6/26/2026</a:t>
             </a:fld>
             <a:endParaRPr lang="en-US"/>
           </a:p>
@@ -1380,7 +1380,7 @@
             <a:fld id="{1D8BD707-D9CF-40AE-B4C6-C98DA3205C09}" type="datetimeFigureOut">
               <a:rPr lang="en-US" smtClean="0"/>
               <a:pPr/>
-              <a:t>6/23/2026</a:t>
+              <a:t>6/26/2026</a:t>
             </a:fld>
             <a:endParaRPr lang="en-US"/>
           </a:p>
@@ -1796,7 +1796,7 @@
             <a:fld id="{1D8BD707-D9CF-40AE-B4C6-C98DA3205C09}" type="datetimeFigureOut">
               <a:rPr lang="en-US" smtClean="0"/>
               <a:pPr/>
-              <a:t>6/23/2026</a:t>
+              <a:t>6/26/2026</a:t>
             </a:fld>
             <a:endParaRPr lang="en-US"/>
           </a:p>
@@ -1910,7 +1910,7 @@
             <a:fld id="{1D8BD707-D9CF-40AE-B4C6-C98DA3205C09}" type="datetimeFigureOut">
               <a:rPr lang="en-US" smtClean="0"/>
               <a:pPr/>
-              <a:t>6/23/2026</a:t>
+              <a:t>6/26/2026</a:t>
             </a:fld>
             <a:endParaRPr lang="en-US"/>
           </a:p>
@@ -2002,7 +2002,7 @@
             <a:fld id="{1D8BD707-D9CF-40AE-B4C6-C98DA3205C09}" type="datetimeFigureOut">
               <a:rPr lang="en-US" smtClean="0"/>
               <a:pPr/>
-              <a:t>6/23/2026</a:t>
+              <a:t>6/26/2026</a:t>
             </a:fld>
             <a:endParaRPr lang="en-US"/>
           </a:p>
@@ -2274,7 +2274,7 @@
             <a:fld id="{1D8BD707-D9CF-40AE-B4C6-C98DA3205C09}" type="datetimeFigureOut">
               <a:rPr lang="en-US" smtClean="0"/>
               <a:pPr/>
-              <a:t>6/23/2026</a:t>
+              <a:t>6/26/2026</a:t>
             </a:fld>
             <a:endParaRPr lang="en-US"/>
           </a:p>
@@ -2523,7 +2523,7 @@
             <a:fld id="{1D8BD707-D9CF-40AE-B4C6-C98DA3205C09}" type="datetimeFigureOut">
               <a:rPr lang="en-US" smtClean="0"/>
               <a:pPr/>
-              <a:t>6/23/2026</a:t>
+              <a:t>6/26/2026</a:t>
             </a:fld>
             <a:endParaRPr lang="en-US"/>
           </a:p>
@@ -2731,7 +2731,7 @@
             <a:fld id="{1D8BD707-D9CF-40AE-B4C6-C98DA3205C09}" type="datetimeFigureOut">
               <a:rPr lang="en-US" smtClean="0"/>
               <a:pPr/>
-              <a:t>6/23/2026</a:t>
+              <a:t>6/26/2026</a:t>
             </a:fld>
             <a:endParaRPr lang="en-US"/>
           </a:p>
@@ -3351,7 +3351,7 @@
         <p:spPr>
           <a:xfrm>
             <a:off x="2897064" y="5525788"/>
-            <a:ext cx="4494336" cy="573746"/>
+            <a:ext cx="4494336" cy="534826"/>
           </a:xfrm>
           <a:prstGeom prst="rect">
             <a:avLst/>
@@ -3369,7 +3369,7 @@
               </a:lnSpc>
             </a:pPr>
             <a:r>
-              <a:rPr lang="en-US" sz="3330" b="1" dirty="0">
+              <a:rPr lang="en-US" sz="2500" b="1" dirty="0">
                 <a:solidFill>
                   <a:srgbClr val="000000"/>
                 </a:solidFill>
@@ -11228,7 +11228,7 @@
         <p:spPr>
           <a:xfrm>
             <a:off x="5578684" y="2993443"/>
-            <a:ext cx="4098364" cy="548130"/>
+            <a:ext cx="4098364" cy="505972"/>
           </a:xfrm>
           <a:prstGeom prst="rect">
             <a:avLst/>
@@ -11246,7 +11246,7 @@
               </a:lnSpc>
             </a:pPr>
             <a:r>
-              <a:rPr lang="en-US" sz="3170" b="1" dirty="0">
+              <a:rPr lang="en-US" sz="2500" b="1" dirty="0">
                 <a:solidFill>
                   <a:srgbClr val="FFFFFF"/>
                 </a:solidFill>
@@ -11539,7 +11539,7 @@
                 <a:cs typeface="Open Sans Bold Italics"/>
                 <a:sym typeface="Open Sans Bold Italics"/>
               </a:rPr>
-              <a:t>: 60 meses.</a:t>
+              <a:t>: [PRAZO]</a:t>
             </a:r>
           </a:p>
           <a:p>
